--- a/渋一プロジェクト概要.pptx
+++ b/渋一プロジェクト概要.pptx
@@ -6249,7 +6249,7 @@
               </a:defRPr>
             </a:pPr>
             <a:r>
-              <a:t>高貴・巨大資本【S2】</a:t>
+              <a:t>高貴・巨大資本</a:t>
             </a:r>
           </a:p>
         </p:txBody>
@@ -6305,7 +6305,7 @@
             <a:avLst/>
           </a:prstGeom>
           <a:solidFill>
-            <a:srgbClr val="D4267E"/>
+            <a:srgbClr val="FF1493"/>
           </a:solidFill>
           <a:ln>
             <a:noFill/>
@@ -6401,7 +6401,7 @@
             <a:pPr algn="l">
               <a:defRPr sz="1500" b="1">
                 <a:solidFill>
-                  <a:srgbClr val="D4267E"/>
+                  <a:srgbClr val="FF1493"/>
                 </a:solidFill>
                 <a:latin typeface="Hiragino Kaku Gothic ProN"/>
               </a:defRPr>
@@ -6483,7 +6483,7 @@
               </a:defRPr>
             </a:pPr>
             <a:r>
-              <a:t>クラブ・DJ・情報操作</a:t>
+              <a:t>クラブ・ナイトカルチャー【S2】</a:t>
             </a:r>
           </a:p>
         </p:txBody>
@@ -7406,7 +7406,7 @@
             <a:br/>
             <a:br/>
             <a:r>
-              <a:t>全5校がキャットストリートに集結する大乱戦。るいはりょうすけとの一騎打ちに勝利。ゆうたとしおんが帰還。日常を取り戻すも、S2の脅威となる「桜ヶ丘」のツヨシとヒトミが静かに動き出す。</a:t>
+              <a:t>全5校がキャットストリートに集結する大乱戦。るいはりょうすけとの一騎打ちに勝利。ゆうたとしおんが帰還。日常を取り戻すも、S2の脅威となる「円山」のナオ率いるイケメン集団が静かに姿を現す。</a:t>
             </a:r>
           </a:p>
         </p:txBody>
@@ -8198,7 +8198,7 @@
             </a:r>
             <a:br/>
             <a:r>
-              <a:t>サクラが次なる脅威として登場。</a:t>
+              <a:t>マルヤマが次なる脅威として登場。</a:t>
             </a:r>
           </a:p>
         </p:txBody>
